--- a/slides/talk-mpc/talk-mpc.pptx
+++ b/slides/talk-mpc/talk-mpc.pptx
@@ -536,7 +536,7 @@
           <a:lstStyle/>
           <a:p>
             <a:r>
-              <a:t>이 발표는 리서치 탭의 MPC 구축 문서(§M)를 이야기로 옮긴 것입니다. MPPI를 대체하지 않고 형제로 NMPC를 더한 과정을 설계, 최근 연구, 작업 기록 순서로 봅니다. 숫자는 모두 문서의 작업 기록과 STATE에서 가져왔고 TP 번호를 달았습니다.</a:t>
+              <a:t>이 발표는 리서치 탭의 MPC 구축 문서(§M)를 이야기로 옮긴 것입니다. MPPI를 대체하지 않고 형제로 NMPC를 더한 과정을 설계, 최근 연구, 작업 기록 순서로 살펴봅니다. 숫자는 모두 문서의 작업 기록과 STATE에서 가져왔고 TP 번호를 달았습니다.</a:t>
             </a:r>
           </a:p>
         </p:txBody>
@@ -606,7 +606,7 @@
           <a:lstStyle/>
           <a:p>
             <a:r>
-              <a:t>AntBot 제어기의 역기구학은 미분할 수 없는 연산으로 되어 있어 최적화에 넣지 않았습니다. 대신 모듈 한계를 차체 수준의 상자 제약으로 옮겼습니다. Liu 외는 조향이 ±130°로 막힌 로봇에서 불연속 평면 8개가 속도 공간을 12구역으로 나눈다고 보였습니다. travplan plant는 ±56.2°라 구역 대신 바퀴마다 실현 가능 원뿔이 생기고, 정면 보행자를 옆걸음으로 비키지 못한 원인이 이것이었습니다. NMPC에 넣는다면 원뿔의 매끄러운 근사를 써야 합니다.</a:t>
+              <a:t>AntBot 제어기의 역기구학은 미분할 수 없는 연산으로 되어 있어 최적화에 넣지 않았습니다. 대신 모듈 한계를 차체 수준의 box 제약으로 옮겼습니다. Liu 외는 조향이 ±130°로 막힌 로봇에서 불연속 평면 8개가 속도 공간을 12구역으로 나눈다고 보였습니다. travplan plant는 ±56.2°라 구역 대신 바퀴마다 실현 가능 원뿔이 생기고, 정면 보행자를 횡이동으로 비키지 못한 원인이 이것이었습니다. NMPC에 넣는다면 원뿔의 매끄러운 근사를 써야 합니다.</a:t>
             </a:r>
           </a:p>
         </p:txBody>
@@ -676,7 +676,7 @@
           <a:lstStyle/>
           <a:p>
             <a:r>
-              <a:t>둘째 주제는 학습 잔차입니다. GP 평균을 acados에 넣는 방법이 곧 0차 근사라는 점, 희소 GP를 고른 근거, 튜브의 설계, 세 층 예측 모델, 그리고 plant를 어디서 얻는지를 봅니다.</a:t>
+              <a:t>둘째 주제는 학습 잔차입니다. GP 평균을 acados에 넣는 방법이 곧 0차 근사라는 점, 희소 GP를 고른 근거, 튜브의 설계, 세 층 예측 모델, 그리고 plant를 어디서 얻는지를 살펴봅니다.</a:t>
             </a:r>
           </a:p>
         </p:txBody>
@@ -886,7 +886,7 @@
           <a:lstStyle/>
           <a:p>
             <a:r>
-              <a:t>GP 분산이든 튜브든 SLP든 결국 같은 rho_k를 정하는 장치입니다. GP는 확률이고 튜브는 유계 외란이라 그대로 잇지 못하므로, GP의 신뢰 타원체를 외란 집합으로 쓰는 것이 다리입니다. travplan은 잔차 SGPR의 분산을 노드별 조임으로 바꾸고 8 cm 상한을 두었습니다. 결과는 작업 기록에서 다시 보지만, 측정되는 효과가 없어 기본값은 꺼져 있습니다.</a:t>
+              <a:t>GP 분산이든 튜브든 SLP든 결국 같은 rho_k를 정하는 장치입니다. GP는 확률이고 튜브는 유계 외란이라 그대로 잇지 못하므로, GP의 신뢰 타원체를 외란 집합으로 쓰는 것이 다리입니다. travplan은 잔차 SGPR의 분산을 노드별 조임으로 바꾸고 8 cm 상한을 두었습니다. 결과는 작업 기록에서 다시 다루지만, 측정되는 효과가 없어 기본값은 꺼져 있습니다.</a:t>
             </a:r>
           </a:p>
         </p:txBody>
@@ -956,7 +956,7 @@
           <a:lstStyle/>
           <a:p>
             <a:r>
-              <a:t>2026-10-01 사용자 결정으로 예측 모델을 세 층으로 쌓습니다. 잘 아는 것은 식으로 두고, 식이 못 담는 것만 배운다는 생각입니다. 지금 MPPI와 MPC는 둘 다 기구학 모델 하나로 예측하고 학습 층은 GP 잔차뿐입니다. 학습 층의 데이터는 로봇 메쉬로 굴린 시뮬레이션에서 나오게 하려고 하고, KAIST RaiLab의 FDM 연구가 그 선례입니다.</a:t>
+              <a:t>2026-10-01 사용자 결정으로 예측 모델을 세 층으로 쌓습니다. 잘 아는 것은 식으로 두고, 식이 못 담는 것만 배운다는 생각입니다. 지금 MPPI와 MPC는 둘 다 기구학 모델 하나로 예측하고 학습 층은 GP 잔차뿐입니다. 학습 층의 데이터는 로봇 메쉬로 돌린 시뮬레이션에서 얻으려 하고, KAIST RaiLab의 FDM 연구가 그 선례입니다.</a:t>
             </a:r>
           </a:p>
         </p:txBody>
@@ -1516,7 +1516,7 @@
           <a:lstStyle/>
           <a:p>
             <a:r>
-              <a:t>가져올 것 가운데 TP-0152의 실패 원인에 직접 닿는 것은 조사 밖의 고전 해법인 지연 상태 확장입니다. 명령을 상태로 두고 명령 변화율에 비용을 겁니다. Planner D 초기해는 기대할 몫이 작습니다. mpc 시간 초과 104/360 가운데 82가 설계 한계로 둔 경사로라, 판정은 경사로를 뺀 시간 초과 22/270으로 합니다. 이 순서는 아직 TODO에 넣지 않은 후보입니다.</a:t>
+              <a:t>가져올 것 가운데 TP-0152의 실패 원인에 직접 닿는 것은 조사 밖의 고전 해법인 지연 상태 확장입니다. 명령을 상태로 두고 명령 변화율에 비용을 겁니다. Planner D 초기해는 기대할 이득이 작습니다. mpc 시간 초과 104/360 가운데 82가 설계 한계로 둔 경사로라, 판정은 경사로를 뺀 시간 초과 22/270으로 합니다. 이 순서는 아직 TODO에 넣지 않은 후보입니다.</a:t>
             </a:r>
           </a:p>
         </p:txBody>
@@ -1796,7 +1796,7 @@
           <a:lstStyle/>
           <a:p>
             <a:r>
-              <a:t>노드마다 접평면 하나를 걸자 9/12가 됐습니다. curb_ramp에서는 램프 틈을 통과하고 bumps_potholes에서는 블록 사이를 MPPI와 비슷한 선으로 지납니다. 남은 세 실패는 제어 시간 상위 셋과 정확히 같았고 QP가 반복 한계를 뱉었습니다. 그래서 솔버 문제라고 적었는데, 이것은 다음 장에서 정정합니다.</a:t>
+              <a:t>노드마다 접평면 하나를 걸자 9/12가 됐습니다. curb_ramp에서는 램프 틈을 통과하고 bumps_potholes에서는 블록 사이를 MPPI와 비슷한 선으로 지납니다. 남은 세 실패는 제어 시간 상위 셋과 정확히 같았고 QP가 반복 한계(status 3)로 끝났습니다. 그래서 솔버 문제라고 적었는데, 이것은 다음 장에서 정정합니다.</a:t>
             </a:r>
           </a:p>
         </p:txBody>
@@ -1936,7 +1936,7 @@
           <a:lstStyle/>
           <a:p>
             <a:r>
-              <a:t>보행자는 지형과 같은 방식으로, 노드마다 그 시각의 가장 가까운 보행자 원판에 접평면을 겁니다. 처음 지평 4초 전체에 걸었더니 원판이 통로를 막아 MPC가 물러나다 블록에 닿았습니다. 그래서 자라는 원판은 앞 2초에만 제약으로 걸고 나머지는 재계획에 맡깁니다. slack을 낮추면 보행자를 스쳐서 가중치는 지형과 같게 둡니다. MPC는 여유를 경계까지 써서 MPPI보다 보행자에게 바짝 붙습니다.</a:t>
+              <a:t>보행자는 지형과 같은 방식으로, 노드마다 그 시각의 가장 가까운 보행자 원판에 접평면을 겁니다. 처음 horizon 4초 전체에 걸었더니 원판이 통로를 막아 MPC가 물러나다 블록에 닿았습니다. 그래서 자라는 원판은 앞 2초에만 제약으로 걸고 나머지는 재계획에 맡깁니다. slack을 낮추면 보행자를 스쳐서 가중치는 지형과 같게 둡니다. MPC는 여유를 경계까지 써서 MPPI보다 보행자에게 바짝 붙습니다.</a:t>
             </a:r>
           </a:p>
         </p:txBody>
@@ -2076,7 +2076,7 @@
           <a:lstStyle/>
           <a:p>
             <a:r>
-              <a:t>2026-09-30 사용자 결정으로 MPPI와 NMPC를 함께 개발합니다. 강점이 갈리기 때문입니다. MPPI는 미분이 없어 치명 셀 같은 계단 비용을 그대로 다루고, NMPC는 제약을 명시적으로 두므로 GP 분산이나 튜브가 조일 자리가 있습니다. 벤치마크가 planner+controller 문자열이라 guidance+mpc 스택이 그대로 생기고, 기존 MPPI 결과가 기준선이 됩니다.</a:t>
+              <a:t>2026-09-30 사용자 결정으로 MPPI와 NMPC를 함께 개발합니다. 강점이 갈리기 때문입니다. MPPI는 미분이 필요 없어 치명 셀 같은 계단 비용을 그대로 다루고, NMPC는 제약을 명시적으로 두므로 GP 분산이나 튜브가 조일 자리가 있습니다. 벤치마크가 planner+controller 문자열이라 guidance+mpc 스택이 그대로 생기고, 기존 MPPI 결과가 기준선이 됩니다.</a:t>
             </a:r>
           </a:p>
         </p:txBody>
@@ -2356,7 +2356,7 @@
           <a:lstStyle/>
           <a:p>
             <a:r>
-              <a:t>공정한 비교를 위해 mppi_plant_lag와 같은 정보를 가진 NMPC를 만들었습니다. 가속 상자에 a를 곱하고 명령에서 지연을 되돌리면, 지연만 있는 plant에서 계획한 twist가 그대로 실현됩니다. 그런데 치명이 늘었습니다. 지연 모델은 맞았지만, 지연이 bang-bang 계획을 걸러 주던 필터 역할까지 없어졌기 때문입니다. 가속 비용을 키우면 떨림은 줄었지만 회피가 굼떠져 치명이 더 늘었습니다.</a:t>
+              <a:t>공정한 비교를 위해 mppi_plant_lag와 같은 정보를 가진 NMPC를 만들었습니다. 가속 box에 a를 곱하고 명령에서 지연을 되돌리면, 지연만 있는 plant에서 계획한 twist가 그대로 실현됩니다. 그런데 치명이 늘었습니다. 지연 모델은 맞았지만, 지연이 bang-bang 계획을 걸러 주던 필터 역할까지 없어졌기 때문입니다. 가속 비용을 키우면 떨림은 줄었지만 회피가 굼떠져 치명이 더 늘었습니다.</a:t>
             </a:r>
           </a:p>
         </p:txBody>
@@ -2566,7 +2566,7 @@
           <a:lstStyle/>
           <a:p>
             <a:r>
-              <a:t>첫 주제는 설계입니다. 모델과 OCP를 보고, 솔버 설정에서 배운 것, 마지막으로 이 문서의 핵심인 치명도를 비용에서 제약으로 옮기는 결정을 봅니다.</a:t>
+              <a:t>첫 주제는 설계입니다. 모델과 OCP를 보고, 솔버 설정에서 배운 것, 마지막으로 이 문서의 핵심인 치명도를 비용에서 제약으로 옮기는 결정을 살펴봅니다.</a:t>
             </a:r>
           </a:p>
         </p:txBody>
@@ -2636,7 +2636,7 @@
           <a:lstStyle/>
           <a:p>
             <a:r>
-              <a:t>상태에 차체 twist까지 넣은 것은 변화율, 즉 가속을 상자로 제약하려고입니다. 입력은 twist 변화율이고 이것은 SmoothMPPI와 Planner D의 제어 공간과 같은 좌표계입니다. 지평은 MPPI와 똑같이 40 스텝 0.1초로 맞췄습니다. 다르면 비교가 성립하지 않기 때문입니다. 마지막 줄의 mu_d는 뒤에서 볼 GP 잔차 자리입니다.</a:t>
+              <a:t>상태에 차체 twist까지 넣은 것은 변화율, 즉 가속에 box 제약을 걸기 위해서입니다. 입력은 twist 변화율이고 이것은 SmoothMPPI와 Planner D의 제어 공간과 같은 좌표계입니다. horizon은 MPPI와 똑같이 40 스텝 0.1초로 맞췄습니다. 다르면 비교가 성립하지 않기 때문입니다. 마지막 줄의 mu_d는 뒤에서 볼 GP 잔차 자리입니다.</a:t>
             </a:r>
           </a:p>
         </p:txBody>
@@ -2706,7 +2706,7 @@
           <a:lstStyle/>
           <a:p>
             <a:r>
-              <a:t>OCP는 단순합니다. 참조와의 위치 오차, 옆걸음과 회전을 약하게, 가속을 약하게 벌하는 선형 최소제곱 비용입니다. 종단 가중치 50이 MPPI의 ReferenceCost가 하던 진행 역할을 맡습니다. 제약은 twist와 가속 상자, 그리고 노드마다 치명 셀과 보행자에 대한 반평면 두 줄입니다. 가중치 값은 코드의 MPCConfig 기본값입니다.</a:t>
+              <a:t>OCP는 단순합니다. 참조와의 위치 오차를 벌하고, 횡이동·회전·가속에는 약한 페널티를 주는 선형 최소제곱 비용입니다. 종단 가중치 50이 MPPI의 ReferenceCost가 하던 진행 역할을 맡습니다. 제약은 twist와 가속의 box 제약, 그리고 노드마다 치명 셀과 보행자에 대한 반평면 두 줄입니다. 가중치 값은 코드의 MPCConfig 기본값입니다.</a:t>
             </a:r>
           </a:p>
         </p:txBody>
@@ -2776,7 +2776,7 @@
           <a:lstStyle/>
           <a:p>
             <a:r>
-              <a:t>처음 반평면을 넣었을 때 2/4였습니다. 예측 노드가 제약을 위반한 채 status 0으로 최적이 되고 있었습니다. 벌점만 키우거나 반복만 늘려서는 부족했고, 둘을 함께 바꿔야 4/4가 됐습니다. 하드 제약은 QP가 반복 한계로 터지면서 오히려 나빴습니다. 그래서 기본값은 soft 1e6과 RTI 3회입니다.</a:t>
+              <a:t>처음 반평면을 넣었을 때 2/4였습니다. 예측 노드가 제약을 위반한 채 status 0으로 최적이 되고 있었습니다. 페널티만 키우거나 반복만 늘려서는 부족했고, 둘을 함께 바꿔야 4/4가 됐습니다. hard 제약은 QP가 반복 한계에 걸려 오히려 나빴습니다. 그래서 기본값은 soft 1e6과 RTI 3회입니다.</a:t>
             </a:r>
           </a:p>
         </p:txBody>
@@ -2916,7 +2916,7 @@
           <a:lstStyle/>
           <a:p>
             <a:r>
-              <a:t>MPPI는 치명 벌점 10의 3승으로 그 샘플을 버리지만, 미분으로 푸는 MPC에는 그 길이 없습니다. CasADi가 기호 위치로 격자를 고를 수 없어서, 실무 해법 셋 가운데 소수 장애물을 파라미터로 넘기는 방법을 골랐습니다. travplan의 치명 기하는 대부분 연석 벽이라 원 대신 접평면을 씁니다. 나중에 이산 CBF 감쇠를 더해, 노드의 여유 하한이 로봇 자신의 여유에서 기하급수로 줄어들게 했습니다.</a:t>
+              <a:t>MPPI는 치명 페널티 10³으로 그 샘플을 버리지만, 미분으로 푸는 MPC에는 그 길이 없습니다. CasADi가 기호 위치로 격자를 고를 수 없어서, 실무 해법 셋 가운데 소수 장애물을 파라미터로 넘기는 방법을 골랐습니다. travplan의 치명 기하는 대부분 연석 벽이라 원 대신 접평면을 씁니다. 나중에 이산 CBF 감쇠를 더해, 노드의 여유 하한이 로봇 자신의 여유에서 기하급수로 줄어들게 했습니다.</a:t>
             </a:r>
           </a:p>
         </p:txBody>
@@ -6462,7 +6462,7 @@
                 <a:ea typeface="Malgun Gothic"/>
                 <a:cs typeface="Malgun Gothic"/>
               </a:rPr>
-              <a:t>모듈 역기구학은 넣지 않고, 차체 상자 제약으로 번역한다</a:t>
+              <a:t>모듈 역기구학은 넣지 않고, 차체 box 제약으로 옮긴다</a:t>
             </a:r>
           </a:p>
         </p:txBody>
@@ -8021,7 +8021,7 @@
         <p:spPr>
           <a:xfrm>
             <a:off x="6223000" y="2865239"/>
-            <a:ext cx="5440934" cy="295250"/>
+            <a:ext cx="5440934" cy="539700"/>
           </a:xfrm>
           <a:prstGeom prst="rect">
             <a:avLst/>
@@ -8048,7 +8048,7 @@
                 <a:ea typeface="Malgun Gothic"/>
                 <a:cs typeface="Malgun Gothic"/>
               </a:rPr>
-              <a:t>명목 대비 RMSE 66–78% 감소. 첫 시도는 95% 적중 0.35였다(관측 잡음 </a:t>
+              <a:t>명목 대비 RMSE 66–78% 감소. 첫 시도는 95% coverage 0.35였다(관측 잡음 </a:t>
             </a:r>
             <a:r>
               <a:rPr sz="1050" b="0" i="1">
@@ -8084,7 +8084,7 @@
           <p:nvPr/>
         </p:nvGraphicFramePr>
         <p:xfrm>
-          <a:off x="711200" y="3238599"/>
+          <a:off x="711200" y="3434159"/>
           <a:ext cx="10769601" cy="772011"/>
         </p:xfrm>
         <a:graphic>
@@ -8405,7 +8405,7 @@
         </p:nvSpPr>
         <p:spPr>
           <a:xfrm>
-            <a:off x="711200" y="4324648"/>
+            <a:off x="711200" y="4520208"/>
             <a:ext cx="10769600" cy="502543"/>
           </a:xfrm>
           <a:prstGeom prst="roundRect">
@@ -8436,7 +8436,7 @@
         </p:nvSpPr>
         <p:spPr>
           <a:xfrm>
-            <a:off x="889000" y="4451648"/>
+            <a:off x="889000" y="4647208"/>
             <a:ext cx="10751820" cy="361479"/>
           </a:xfrm>
           <a:prstGeom prst="rect">
@@ -8475,7 +8475,7 @@
                 <a:ea typeface="Malgun Gothic"/>
                 <a:cs typeface="Malgun Gothic"/>
               </a:rPr>
-              <a:t> TP-0071에서 반평면용으로 깐 파라미터 배관이 그대로 0차 GP-MPC가 됐다.</a:t>
+              <a:t> TP-0071에서 반평면용으로 만든 파라미터 전달 구조가 그대로 0차 GP-MPC가 됐다.</a:t>
             </a:r>
           </a:p>
         </p:txBody>
@@ -8583,7 +8583,7 @@
                 <a:ea typeface="Malgun Gothic"/>
                 <a:cs typeface="Malgun Gothic"/>
               </a:rPr>
-              <a:t>SGPR 유도점 64만 네 축을 모두 통과한다</a:t>
+              <a:t>SGPR inducing point 64만 네 축을 모두 통과한다</a:t>
             </a:r>
           </a:p>
         </p:txBody>
@@ -8598,7 +8598,7 @@
         </p:nvGraphicFramePr>
         <p:xfrm>
           <a:off x="711200" y="1361678"/>
-          <a:ext cx="10769601" cy="1544613"/>
+          <a:ext cx="10769599" cy="1544613"/>
         </p:xfrm>
         <a:graphic>
           <a:graphicData uri="http://schemas.openxmlformats.org/drawingml/2006/table">
@@ -8607,11 +8607,11 @@
                 <a:tableStyleId>{5C22544A-7EE6-4342-B048-85BDC9FD1C3A}</a:tableStyleId>
               </a:tblPr>
               <a:tblGrid>
-                <a:gridCol w="2762250"/>
-                <a:gridCol w="1785938"/>
-                <a:gridCol w="2001441"/>
-                <a:gridCol w="1735931"/>
-                <a:gridCol w="2484041"/>
+                <a:gridCol w="3507085"/>
+                <a:gridCol w="1619845"/>
+                <a:gridCol w="1815207"/>
+                <a:gridCol w="1574403"/>
+                <a:gridCol w="2253059"/>
               </a:tblGrid>
               <a:tr h="269622">
                 <a:tc>
@@ -9005,7 +9005,7 @@
                           <a:ea typeface="Malgun Gothic"/>
                           <a:cs typeface="Malgun Gothic"/>
                         </a:rPr>
-                        <a:t>SGPR 유도점 64</a:t>
+                        <a:t>SGPR inducing point 64</a:t>
                       </a:r>
                     </a:p>
                   </a:txBody>
@@ -9922,7 +9922,7 @@
                 <a:ea typeface="Malgun Gothic"/>
                 <a:cs typeface="Malgun Gothic"/>
               </a:rPr>
-              <a:t> 정확 GP를 SGPR 64로 바꾼 것만으로 폐루프 발산(0/12)이 멈췄다. 발상이 아니라 근사의 문제였다.</a:t>
+              <a:t> 정확 GP를 SGPR 64로 바꾼 것만으로 폐루프 발산(0/12)이 멈췄다. 아이디어가 아니라 근사의 문제였다.</a:t>
             </a:r>
           </a:p>
         </p:txBody>
@@ -11273,7 +11273,7 @@
                           <a:ea typeface="Malgun Gothic"/>
                           <a:cs typeface="Malgun Gothic"/>
                         </a:rPr>
-                        <a:t>twist 적분 + 상자·가속 한계 (</a:t>
+                        <a:t>twist 적분 + box·가속 한계 (</a:t>
                       </a:r>
                       <a:r>
                         <a:rPr sz="850" b="0" i="0">
@@ -11584,7 +11584,7 @@
                 <a:ea typeface="Malgun Gothic"/>
                 <a:cs typeface="Malgun Gothic"/>
               </a:rPr>
-              <a:t>학습 층은 로봇 메쉬를 고도 지도 위에서 굴린 forward 시뮬레이션에서 자기 지도로 배운다(TP-0125). 한 점의 cost로는 자세·하부 간섭·단차를 구별하지 못한다.</a:t>
+              <a:t>학습 층은 로봇 메쉬를 고도 지도 위에서 forward 시뮬레이션한 데이터로 자기지도 학습한다(TP-0125). 한 점의 cost로는 자세·하부 간섭·단차를 구별하지 못한다.</a:t>
             </a:r>
           </a:p>
         </p:txBody>
@@ -11625,7 +11625,7 @@
                 <a:ea typeface="Malgun Gothic"/>
                 <a:cs typeface="Malgun Gothic"/>
               </a:rPr>
-              <a:t>선례: FDM + 샘플링 MPC(Kim 외, RSS 2022)는 6초 궤적 1,500개를 3 ms에 굴린다 [10]. actuator net(Hwangbo 외, 2019) [11].</a:t>
+              <a:t>선례: FDM + 샘플링 MPC(Kim 외, RSS 2022)는 6초 궤적 1,500개를 3 ms에 rollout한다 [10]. actuator net(Hwangbo 외, 2019) [11].</a:t>
             </a:r>
           </a:p>
         </p:txBody>
@@ -12622,7 +12622,7 @@
                 <a:ea typeface="Malgun Gothic"/>
                 <a:cs typeface="Malgun Gothic"/>
               </a:rPr>
-              <a:t>관성은 자리표시자(TP-0035)</a:t>
+              <a:t>관성은 placeholder 값(TP-0035)</a:t>
             </a:r>
           </a:p>
         </p:txBody>
@@ -13742,7 +13742,7 @@
                 <a:ea typeface="Malgun Gothic"/>
                 <a:cs typeface="Malgun Gothic"/>
               </a:rPr>
-              <a:t>기울기 쪽은 잔차·튜브를, 초기해 쪽은 학습 모델을 더한다</a:t>
+              <a:t>gradient 쪽은 잔차·튜브를, 초기해 쪽은 학습 모델을 더한다</a:t>
             </a:r>
           </a:p>
         </p:txBody>
@@ -13757,7 +13757,7 @@
         </p:nvGraphicFramePr>
         <p:xfrm>
           <a:off x="711200" y="1361678"/>
-          <a:ext cx="10769601" cy="1794163"/>
+          <a:ext cx="10769600" cy="1794163"/>
         </p:xfrm>
         <a:graphic>
           <a:graphicData uri="http://schemas.openxmlformats.org/drawingml/2006/table">
@@ -13766,11 +13766,11 @@
                 <a:tableStyleId>{5C22544A-7EE6-4342-B048-85BDC9FD1C3A}</a:tableStyleId>
               </a:tblPr>
               <a:tblGrid>
-                <a:gridCol w="3365798"/>
-                <a:gridCol w="1879005"/>
-                <a:gridCol w="2868811"/>
-                <a:gridCol w="1396107"/>
-                <a:gridCol w="1259880"/>
+                <a:gridCol w="3237905"/>
+                <a:gridCol w="1807567"/>
+                <a:gridCol w="3169146"/>
+                <a:gridCol w="1343025"/>
+                <a:gridCol w="1211957"/>
               </a:tblGrid>
               <a:tr h="263634">
                 <a:tc>
@@ -14445,7 +14445,7 @@
                           <a:ea typeface="Malgun Gothic"/>
                           <a:cs typeface="Malgun Gothic"/>
                         </a:rPr>
-                        <a:t>수축 계량 위 스칼라 튜브로 GP 오차 전파</a:t>
+                        <a:t>contraction metric 위 스칼라 튜브로 GP 오차 전파</a:t>
                       </a:r>
                     </a:p>
                   </a:txBody>
@@ -14543,7 +14543,7 @@
                           <a:ea typeface="Malgun Gothic"/>
                           <a:cs typeface="Malgun Gothic"/>
                         </a:rPr>
-                        <a:t>입출력 기록</a:t>
+                        <a:t>입출력 데이터</a:t>
                       </a:r>
                     </a:p>
                   </a:txBody>
@@ -14567,7 +14567,7 @@
                           <a:ea typeface="Malgun Gothic"/>
                           <a:cs typeface="Malgun Gothic"/>
                         </a:rPr>
-                        <a:t>기록에서 외란 상자, SDP로 튜브</a:t>
+                        <a:t>데이터에서 외란 box, SDP로 튜브</a:t>
                       </a:r>
                     </a:p>
                   </a:txBody>
@@ -14789,7 +14789,7 @@
         <p:spPr>
           <a:xfrm>
             <a:off x="711200" y="781050"/>
-            <a:ext cx="11118088" cy="554335"/>
+            <a:ext cx="11118088" cy="1057870"/>
           </a:xfrm>
           <a:prstGeom prst="rect">
             <a:avLst/>
@@ -14816,7 +14816,7 @@
                 <a:ea typeface="Malgun Gothic"/>
                 <a:cs typeface="Malgun Gothic"/>
               </a:rPr>
-              <a:t>지형은 모델 입력이나 제약으로 들어가고, 샘플링이 비평활 모델을 굴린다</a:t>
+              <a:t>지형은 모델 입력이나 제약으로 들어가고, 샘플링이 비평활 모델을 rollout한다</a:t>
             </a:r>
           </a:p>
         </p:txBody>
@@ -14830,8 +14830,8 @@
           <p:nvPr/>
         </p:nvGraphicFramePr>
         <p:xfrm>
-          <a:off x="711200" y="1361678"/>
-          <a:ext cx="10769601" cy="1794163"/>
+          <a:off x="711200" y="1764506"/>
+          <a:ext cx="10769600" cy="1794163"/>
         </p:xfrm>
         <a:graphic>
           <a:graphicData uri="http://schemas.openxmlformats.org/drawingml/2006/table">
@@ -14840,11 +14840,11 @@
                 <a:tableStyleId>{5C22544A-7EE6-4342-B048-85BDC9FD1C3A}</a:tableStyleId>
               </a:tblPr>
               <a:tblGrid>
-                <a:gridCol w="3946823"/>
-                <a:gridCol w="1799630"/>
-                <a:gridCol w="2759373"/>
-                <a:gridCol w="1127125"/>
-                <a:gridCol w="1136650"/>
+                <a:gridCol w="3945731"/>
+                <a:gridCol w="1856780"/>
+                <a:gridCol w="2728516"/>
+                <a:gridCol w="1114524"/>
+                <a:gridCol w="1124049"/>
               </a:tblGrid>
               <a:tr h="263634">
                 <a:tc>
@@ -15397,7 +15397,7 @@
                           <a:ea typeface="Malgun Gothic"/>
                           <a:cs typeface="Malgun Gothic"/>
                         </a:rPr>
-                        <a:t>MLP 잔차에 에너지 증가 벌점</a:t>
+                        <a:t>MLP 잔차에 에너지 증가 페널티</a:t>
                       </a:r>
                     </a:p>
                   </a:txBody>
@@ -15471,7 +15471,7 @@
                           <a:ea typeface="Malgun Gothic"/>
                           <a:cs typeface="Malgun Gothic"/>
                         </a:rPr>
-                        <a:t>전체 모델 물리 롤아웃 (2025.06 · Sci. Robotics 2025)</a:t>
+                        <a:t>전체 모델 물리 rollout (2025.06 · Sci. Robotics 2025)</a:t>
                       </a:r>
                     </a:p>
                   </a:txBody>
@@ -15495,7 +15495,7 @@
                           <a:ea typeface="Malgun Gothic"/>
                           <a:cs typeface="Malgun Gothic"/>
                         </a:rPr>
-                        <a:t>고도 지도, 발판 후보</a:t>
+                        <a:t>고도 지도, foothold 후보</a:t>
                       </a:r>
                     </a:p>
                   </a:txBody>
@@ -15519,7 +15519,7 @@
                           <a:ea typeface="Malgun Gothic"/>
                           <a:cs typeface="Malgun Gothic"/>
                         </a:rPr>
-                        <a:t>필터 뒤 RaiSim 롤아웃으로 고른다</a:t>
+                        <a:t>필터 뒤 RaiSim rollout으로 고른다</a:t>
                       </a:r>
                     </a:p>
                   </a:txBody>
@@ -15712,7 +15712,7 @@
         </p:nvSpPr>
         <p:spPr>
           <a:xfrm>
-            <a:off x="711200" y="3650258"/>
+            <a:off x="711200" y="4053086"/>
             <a:ext cx="10769600" cy="502543"/>
           </a:xfrm>
           <a:prstGeom prst="roundRect">
@@ -15743,7 +15743,7 @@
         </p:nvSpPr>
         <p:spPr>
           <a:xfrm>
-            <a:off x="889000" y="3777258"/>
+            <a:off x="889000" y="4180086"/>
             <a:ext cx="10751820" cy="361479"/>
           </a:xfrm>
           <a:prstGeom prst="rect">
@@ -19753,7 +19753,7 @@
                 <a:ea typeface="Malgun Gothic"/>
                 <a:cs typeface="Malgun Gothic"/>
               </a:rPr>
-              <a:t>GP 오차 상한, 외란 상자, 오차 불변 집합. M.1.2의 </a:t>
+              <a:t>GP 오차 상한, 외란 box, 오차 불변 집합. M.1.2의 </a:t>
             </a:r>
             <a:r>
               <a:rPr sz="1150" b="0" i="1">
@@ -20840,7 +20840,7 @@
                 <a:ea typeface="Malgun Gothic"/>
                 <a:cs typeface="Malgun Gothic"/>
               </a:rPr>
-              <a:t>는 온라인(고리 버퍼 200, 5 스텝마다). 경사 부호가 없고 하이퍼파라미터는 고정이다.</a:t>
+              <a:t>는 온라인(ring 버퍼 200, 5 스텝마다). 경사 부호가 없고 하이퍼파라미터는 고정이다.</a:t>
             </a:r>
           </a:p>
         </p:txBody>
@@ -21030,7 +21030,7 @@
                 <a:ea typeface="Malgun Gothic"/>
                 <a:cs typeface="Malgun Gothic"/>
               </a:rPr>
-              <a:t>확률이냐 상자냐</a:t>
+              <a:t>확률이냐 box냐</a:t>
             </a:r>
           </a:p>
         </p:txBody>
@@ -21071,7 +21071,7 @@
                 <a:ea typeface="Malgun Gothic"/>
                 <a:cs typeface="Malgun Gothic"/>
               </a:rPr>
-              <a:t>확률은 신뢰도를 고르고, 상자는 단순하지만 크기를 데이터로 정한다. TP-0069의 먼 노드 폭은 보정되지 않았다.</a:t>
+              <a:t>확률은 신뢰도를 고르고, box는 단순하지만 크기를 데이터로 정한다. TP-0069의 먼 노드 폭은 보정되지 않았다.</a:t>
             </a:r>
           </a:p>
         </p:txBody>
@@ -21261,7 +21261,7 @@
                 <a:ea typeface="Malgun Gothic"/>
                 <a:cs typeface="Malgun Gothic"/>
               </a:rPr>
-              <a:t>기울기냐 샘플이냐</a:t>
+              <a:t>gradient냐 샘플이냐</a:t>
             </a:r>
           </a:p>
         </p:txBody>
@@ -21302,7 +21302,7 @@
                 <a:ea typeface="Malgun Gothic"/>
                 <a:cs typeface="Malgun Gothic"/>
               </a:rPr>
-              <a:t>기울기는 매끄러운 모델이 필요하고, 샘플은 접촉·바퀴 이탈을 그대로 굴린다. MPPI와 NMPC가 양쪽에 있다.</a:t>
+              <a:t>gradient는 매끄러운 모델이 필요하고, 샘플은 접촉·바퀴 이탈을 그대로 rollout한다. MPPI와 NMPC가 양쪽에 있다.</a:t>
             </a:r>
           </a:p>
         </p:txBody>
@@ -21533,7 +21533,7 @@
                 <a:ea typeface="Malgun Gothic"/>
                 <a:cs typeface="Malgun Gothic"/>
               </a:rPr>
-              <a:t>Planner 비용(±130°), MPC 운동 모드(±90°). travplan ±56.2°는 원뿔이고, NMPC는 상자만 쓴다.</a:t>
+              <a:t>Planner 비용(±130°), MPC 운동 모드(±90°). travplan ±56.2°는 원뿔이고, NMPC는 box만 쓴다.</a:t>
             </a:r>
           </a:p>
         </p:txBody>
@@ -21616,7 +21616,7 @@
                 <a:ea typeface="Malgun Gothic"/>
                 <a:cs typeface="Malgun Gothic"/>
               </a:rPr>
-              <a:t> 두 갈래가 기울기·샘플 축의 양 끝에 있으니, 같은 벤치마크의 짝 비교가 곧 이 축의 실험이다.</a:t>
+              <a:t> 두 갈래가 gradient·샘플 축의 양 끝에 있으니, 같은 벤치마크의 짝 비교가 곧 이 축의 실험이다.</a:t>
             </a:r>
           </a:p>
         </p:txBody>
@@ -22450,7 +22450,7 @@
                 <a:ea typeface="Malgun Gothic"/>
                 <a:cs typeface="Malgun Gothic"/>
               </a:rPr>
-              <a:t>수축 계량 튜브·SDP 파이프라인: 오프라인 LMI·SDP가 필요하고 실험이 쿼드로터 시뮬뿐이다.</a:t>
+              <a:t>contraction metric 튜브·SDP 파이프라인: 오프라인 LMI·SDP가 필요하고 실험이 쿼드로터 시뮬뿐이다.</a:t>
             </a:r>
           </a:p>
         </p:txBody>
@@ -25226,7 +25226,7 @@
                 <a:ea typeface="Malgun Gothic"/>
                 <a:cs typeface="Malgun Gothic"/>
               </a:rPr>
-              <a:t>노란 선 MPC, 파란 선 MPPI, 빨간 칸 치명 셀, X 실패 지점</a:t>
+              <a:t>노란 선 MPC, 파란 선 MPPI, 빨간 영역 치명 셀, X 실패 지점</a:t>
             </a:r>
           </a:p>
         </p:txBody>
@@ -26111,7 +26111,7 @@
                 <a:ea typeface="Malgun Gothic"/>
                 <a:cs typeface="Malgun Gothic"/>
               </a:rPr>
-              <a:t> 노드마다 따로 거는 접평면이라 램프 양옆 벽을 서로 다른 노드가 집는다.</a:t>
+              <a:t> 노드마다 따로 거는 접평면이라 램프 양옆 벽을 서로 다른 노드가 잡는다.</a:t>
             </a:r>
           </a:p>
         </p:txBody>
@@ -26360,7 +26360,7 @@
                           <a:ea typeface="Malgun Gothic"/>
                           <a:cs typeface="Malgun Gothic"/>
                         </a:rPr>
-                        <a:t>가장 가까운 치명 칸이 자기 자신이라 법선이 없어 행을 껐다</a:t>
+                        <a:t>가장 가까운 치명 셀이 자기 자신이라 법선이 없어 행을 껐다</a:t>
                       </a:r>
                     </a:p>
                   </a:txBody>
@@ -26384,7 +26384,7 @@
                           <a:ea typeface="Malgun Gothic"/>
                           <a:cs typeface="Malgun Gothic"/>
                         </a:rPr>
-                        <a:t>가장 가까운 자유 칸 쪽 법선</a:t>
+                        <a:t>가장 가까운 자유 셀 쪽 법선</a:t>
                       </a:r>
                     </a:p>
                   </a:txBody>
@@ -26410,7 +26410,7 @@
                           <a:ea typeface="Malgun Gothic"/>
                           <a:cs typeface="Malgun Gothic"/>
                         </a:rPr>
-                        <a:t>칸 중심에서 잰 여유</a:t>
+                        <a:t>셀 중심에서 잰 여유</a:t>
                       </a:r>
                     </a:p>
                   </a:txBody>
@@ -26458,7 +26458,7 @@
                           <a:ea typeface="Malgun Gothic"/>
                           <a:cs typeface="Malgun Gothic"/>
                         </a:rPr>
-                        <a:t>가장자리에서 잰다(반 칸)</a:t>
+                        <a:t>가장자리에서 잰다(반 셀)</a:t>
                       </a:r>
                     </a:p>
                   </a:txBody>
@@ -26554,7 +26554,7 @@
                           <a:ea typeface="Malgun Gothic"/>
                           <a:cs typeface="Malgun Gothic"/>
                         </a:rPr>
-                        <a:t>바깥 한 칸을 치명으로</a:t>
+                        <a:t>바깥 한 셀을 치명으로</a:t>
                       </a:r>
                     </a:p>
                   </a:txBody>
@@ -26580,7 +26580,7 @@
                           <a:ea typeface="Malgun Gothic"/>
                           <a:cs typeface="Malgun Gothic"/>
                         </a:rPr>
-                        <a:t>칸 조회 (코드 리뷰)</a:t>
+                        <a:t>셀 조회 (코드 리뷰)</a:t>
                       </a:r>
                     </a:p>
                   </a:txBody>
@@ -26604,7 +26604,7 @@
                           <a:ea typeface="Malgun Gothic"/>
                           <a:cs typeface="Malgun Gothic"/>
                         </a:rPr>
-                        <a:t>내림으로 찾아 반 칸 어긋났다</a:t>
+                        <a:t>내림으로 찾아 반 셀 어긋났다</a:t>
                       </a:r>
                     </a:p>
                   </a:txBody>
@@ -27595,7 +27595,7 @@
                 <a:ea typeface="Malgun Gothic"/>
                 <a:cs typeface="Malgun Gothic"/>
               </a:rPr>
-              <a:t>지평 전체에 걸면 로봇이 얼어붙는다</a:t>
+              <a:t>horizon 전체에 걸면 로봇이 얼어붙는다</a:t>
             </a:r>
           </a:p>
         </p:txBody>
@@ -28417,7 +28417,7 @@
                 <a:ea typeface="Malgun Gothic"/>
                 <a:cs typeface="Malgun Gothic"/>
               </a:rPr>
-              <a:t>가 0.93 m/s를 넘지 않았다. 지평 뒤쪽은 1.1–1.5 m/s를 계획한다. 가진 주행 998 샘플을 더했다.</a:t>
+              <a:t>가 0.93 m/s를 넘지 않았다. horizon 뒤쪽은 1.1–1.5 m/s를 계획한다. 가진(excitation) 주행 998 샘플을 더했다.</a:t>
             </a:r>
           </a:p>
         </p:txBody>
@@ -30092,7 +30092,7 @@
                 <a:ea typeface="Malgun Gothic"/>
                 <a:cs typeface="Malgun Gothic"/>
               </a:rPr>
-              <a:t> 목적은 성능이 아니라, GP 잔차·0차 근사·튜브를 얹을 </a:t>
+              <a:t> 목적은 성능이 아니라, GP 잔차·0차 근사·튜브로 </a:t>
             </a:r>
             <a:r>
               <a:rPr sz="1300" b="1" i="0">
@@ -36148,7 +36148,7 @@
                 <a:ea typeface="Malgun Gothic"/>
                 <a:cs typeface="Malgun Gothic"/>
               </a:rPr>
-              <a:t>twist를 상태에 두어 가속을 상자 제약으로 묶는다</a:t>
+              <a:t>twist를 상태에 두어 가속에 box 제약을 건다</a:t>
             </a:r>
           </a:p>
         </p:txBody>
@@ -36172,8 +36172,8 @@
                 <a:tableStyleId>{5C22544A-7EE6-4342-B048-85BDC9FD1C3A}</a:tableStyleId>
               </a:tblPr>
               <a:tblGrid>
-                <a:gridCol w="922635"/>
-                <a:gridCol w="4335165"/>
+                <a:gridCol w="1269206"/>
+                <a:gridCol w="3988594"/>
               </a:tblGrid>
               <a:tr h="263634">
                 <a:tc>
@@ -36362,7 +36362,7 @@
                           <a:ea typeface="Malgun Gothic"/>
                           <a:cs typeface="Malgun Gothic"/>
                         </a:rPr>
-                        <a:t>지평</a:t>
+                        <a:t>horizon</a:t>
                       </a:r>
                     </a:p>
                   </a:txBody>
@@ -36826,7 +36826,7 @@
                 <a:ea typeface="Malgun Gothic"/>
                 <a:cs typeface="Malgun Gothic"/>
               </a:rPr>
-              <a:t>모듈 역기구학. 차체 상자 제약으로 번역한다.</a:t>
+              <a:t>모듈 역기구학. 차체 box 제약으로 옮긴다.</a:t>
             </a:r>
           </a:p>
         </p:txBody>
@@ -37393,7 +37393,7 @@
                 <a:ea typeface="Malgun Gothic"/>
                 <a:cs typeface="Malgun Gothic"/>
               </a:rPr>
-              <a:t> 입력 좌표계가 SmoothMPPI·Planner D와 같아서, 지평이 같으면 비교가 성립한다.</a:t>
+              <a:t> 입력 좌표계가 SmoothMPPI·Planner D와 같아서, horizon이 같으면 비교가 성립한다.</a:t>
             </a:r>
           </a:p>
         </p:txBody>
@@ -38905,7 +38905,7 @@
                 <a:ea typeface="Malgun Gothic"/>
                 <a:cs typeface="Malgun Gothic"/>
               </a:rPr>
-              <a:t>장애물·보행자 행 1e6, twist 상자 1e5. 나쁜 초기해가 문제를 불능으로 만들지 않게 한다.</a:t>
+              <a:t>장애물·보행자 행 1e6, twist box 1e5. 나쁜 초기해가 문제를 infeasible하게 만들지 않게 한다.</a:t>
             </a:r>
           </a:p>
         </p:txBody>
@@ -39098,7 +39098,7 @@
                 <a:ea typeface="Malgun Gothic"/>
                 <a:cs typeface="Malgun Gothic"/>
               </a:rPr>
-              <a:t>벌점 1e6과 RTI 3회가 함께여야 접평면 제약이 선다</a:t>
+              <a:t>페널티 1e6과 RTI 3회가 함께여야 접평면 제약이 선다</a:t>
             </a:r>
           </a:p>
         </p:txBody>
@@ -39122,8 +39122,8 @@
                 <a:tableStyleId>{5C22544A-7EE6-4342-B048-85BDC9FD1C3A}</a:tableStyleId>
               </a:tblPr>
               <a:tblGrid>
-                <a:gridCol w="2979837"/>
-                <a:gridCol w="2277963"/>
+                <a:gridCol w="3053259"/>
+                <a:gridCol w="2204541"/>
               </a:tblGrid>
               <a:tr h="263634">
                 <a:tc>
@@ -39190,7 +39190,7 @@
                           <a:ea typeface="Malgun Gothic"/>
                           <a:cs typeface="Malgun Gothic"/>
                         </a:rPr>
-                        <a:t>느슨한 벌점 1e4, RTI 1회</a:t>
+                        <a:t>느슨한 페널티 1e4, RTI 1회</a:t>
                       </a:r>
                     </a:p>
                   </a:txBody>
@@ -39240,7 +39240,7 @@
                           <a:ea typeface="Malgun Gothic"/>
                           <a:cs typeface="Malgun Gothic"/>
                         </a:rPr>
-                        <a:t>벌점만 1e6</a:t>
+                        <a:t>페널티만 1e6</a:t>
                       </a:r>
                     </a:p>
                   </a:txBody>
@@ -39340,7 +39340,7 @@
                           <a:ea typeface="Malgun Gothic"/>
                           <a:cs typeface="Malgun Gothic"/>
                         </a:rPr>
-                        <a:t>벌점 1e6 + RTI 3회</a:t>
+                        <a:t>페널티 1e6 + RTI 3회</a:t>
                       </a:r>
                     </a:p>
                   </a:txBody>
@@ -39390,7 +39390,7 @@
                           <a:ea typeface="Malgun Gothic"/>
                           <a:cs typeface="Malgun Gothic"/>
                         </a:rPr>
-                        <a:t>하드 제약</a:t>
+                        <a:t>hard 제약</a:t>
                       </a:r>
                     </a:p>
                   </a:txBody>
@@ -39614,7 +39614,7 @@
                 <a:ea typeface="Malgun Gothic"/>
                 <a:cs typeface="Malgun Gothic"/>
               </a:rPr>
-              <a:t>접평면은 iterate에 매달려 있다</a:t>
+              <a:t>접평면은 iterate에 따라 달라진다</a:t>
             </a:r>
           </a:p>
         </p:txBody>
@@ -39655,7 +39655,7 @@
                 <a:ea typeface="Malgun Gothic"/>
                 <a:cs typeface="Malgun Gothic"/>
               </a:rPr>
-              <a:t>RTI는 호출당 뉴턴 한 걸음이다. 노드가 움직이면 접평면도 바뀌므로 반복을 늘려야 제약과 해가 만난다.</a:t>
+              <a:t>RTI는 호출당 Newton 스텝 한 번이다. 노드가 움직이면 접평면도 바뀌므로 반복을 늘려야 제약과 해가 만난다.</a:t>
             </a:r>
           </a:p>
         </p:txBody>
@@ -39925,7 +39925,7 @@
                 <a:ea typeface="Malgun Gothic"/>
                 <a:cs typeface="Malgun Gothic"/>
               </a:rPr>
-              <a:t>가장 가까운 치명 칸을 수치로</a:t>
+              <a:t>가장 가까운 치명 셀을 수치로</a:t>
             </a:r>
           </a:p>
         </p:txBody>
@@ -40487,7 +40487,7 @@
                 <a:ea typeface="Malgun Gothic"/>
                 <a:cs typeface="Malgun Gothic"/>
               </a:rPr>
-              <a:t>뉴턴 한 걸음, 노드가 움직인다</a:t>
+              <a:t>Newton 스텝 한 번, 노드가 움직인다</a:t>
             </a:r>
           </a:p>
         </p:txBody>
@@ -40840,7 +40840,7 @@
                 <a:ea typeface="Malgun Gothic"/>
                 <a:cs typeface="Malgun Gothic"/>
               </a:rPr>
-              <a:t> 풀리지 않는 QP는 안전이 아니라 무작위다. 그래서 모든 행을 soft로 둔다.</a:t>
+              <a:t> 풀리지 않는 QP가 내는 것은 안전이 아니라 무작위 명령이다. 그래서 모든 행을 soft로 둔다.</a:t>
             </a:r>
           </a:p>
         </p:txBody>
@@ -42071,7 +42071,7 @@
                 <a:ea typeface="Malgun Gothic"/>
                 <a:cs typeface="Malgun Gothic"/>
               </a:rPr>
-              <a:t> 경사·거칠기의 매끄러운 지형 항은 아직 없다. 치명 칸 근처 여유는 부드러운 여유 행(TP-0117)이 맡는다.</a:t>
+              <a:t> 경사·거칠기의 매끄러운 지형 항은 아직 없다. 치명 셀 근처 여유는 부드러운 여유 행(TP-0117)이 맡는다.</a:t>
             </a:r>
           </a:p>
         </p:txBody>
@@ -42179,7 +42179,7 @@
                 <a:ea typeface="Malgun Gothic"/>
                 <a:cs typeface="Malgun Gothic"/>
               </a:rPr>
-              <a:t>기울기가 없는 치명 셀은 비용이 아니라 제약으로 넣는다</a:t>
+              <a:t>gradient가 없는 치명 셀은 비용이 아니라 제약으로 넣는다</a:t>
             </a:r>
           </a:p>
         </p:txBody>
@@ -42261,7 +42261,7 @@
                 <a:ea typeface="Malgun Gothic"/>
                 <a:cs typeface="Malgun Gothic"/>
               </a:rPr>
-              <a:t>CasADi는 기호 인덱스로 격자를 읽지 못한다. 그래서 매 스텝 EDT로 가장 가까운 치명 칸을 </a:t>
+              <a:t>CasADi는 기호 인덱스로 격자를 읽지 못한다. 그래서 매 스텝 EDT로 가장 가까운 치명 셀을 </a:t>
             </a:r>
             <a:r>
               <a:rPr sz="1250" b="1" i="0">
@@ -42462,7 +42462,7 @@
                 <a:ea typeface="Malgun Gothic"/>
                 <a:cs typeface="Malgun Gothic"/>
               </a:rPr>
-              <a:t> 칸 크기, </a:t>
+              <a:t> 셀 크기, </a:t>
             </a:r>
             <a:r>
               <a:rPr sz="1050" b="0" i="1">
